--- a/presentation/Presentation.pptx
+++ b/presentation/Presentation.pptx
@@ -15,8 +15,8 @@
     <p:sldId id="285" r:id="rId6"/>
     <p:sldId id="257" r:id="rId7"/>
     <p:sldId id="286" r:id="rId8"/>
-    <p:sldId id="287" r:id="rId9"/>
-    <p:sldId id="290" r:id="rId10"/>
+    <p:sldId id="293" r:id="rId9"/>
+    <p:sldId id="294" r:id="rId10"/>
     <p:sldId id="289" r:id="rId11"/>
     <p:sldId id="288" r:id="rId12"/>
     <p:sldId id="291" r:id="rId13"/>
@@ -131,8 +131,8 @@
             <p14:sldId id="285"/>
             <p14:sldId id="257"/>
             <p14:sldId id="286"/>
-            <p14:sldId id="287"/>
-            <p14:sldId id="290"/>
+            <p14:sldId id="293"/>
+            <p14:sldId id="294"/>
             <p14:sldId id="289"/>
             <p14:sldId id="288"/>
             <p14:sldId id="291"/>
@@ -245,7 +245,7 @@
           <a:p>
             <a:fld id="{E4C3FCC2-4E7A-4671-AA79-177CB194E449}" type="datetimeFigureOut">
               <a:rPr lang="en-US" smtClean="0"/>
-              <a:t>7/30/2026</a:t>
+              <a:t>8/4/2026</a:t>
             </a:fld>
             <a:endParaRPr lang="en-US"/>
           </a:p>
@@ -2218,7 +2218,7 @@
           <a:p>
             <a:fld id="{4744E560-77BF-4D1A-B6E7-CD55CE12B1B8}" type="datetimeFigureOut">
               <a:rPr lang="en-US" smtClean="0"/>
-              <a:t>7/30/2026</a:t>
+              <a:t>8/4/2026</a:t>
             </a:fld>
             <a:endParaRPr lang="en-US"/>
           </a:p>
@@ -2897,7 +2897,7 @@
         <p:spPr>
           <a:xfrm>
             <a:off x="533459" y="1485932"/>
-            <a:ext cx="11054107" cy="4836209"/>
+            <a:ext cx="6644089" cy="4836209"/>
           </a:xfrm>
           <a:prstGeom prst="rect">
             <a:avLst/>
@@ -3074,120 +3074,150 @@
           <a:p>
             <a:pPr marL="0" indent="0">
               <a:lnSpc>
-                <a:spcPct val="150000"/>
+                <a:spcPct val="100000"/>
               </a:lnSpc>
               <a:buNone/>
             </a:pPr>
             <a:r>
-              <a:rPr lang="en-IN" sz="1600" dirty="0"/>
+              <a:rPr lang="en-IN" sz="1400" dirty="0"/>
               <a:t>The dashboard also includes multiple visualizations to help users understand trends and patterns in the data.</a:t>
             </a:r>
           </a:p>
           <a:p>
             <a:pPr marL="0" indent="0">
               <a:lnSpc>
-                <a:spcPct val="150000"/>
+                <a:spcPct val="100000"/>
               </a:lnSpc>
               <a:buNone/>
             </a:pPr>
             <a:r>
-              <a:rPr lang="en-IN" sz="1600" dirty="0"/>
+              <a:rPr lang="en-IN" sz="1400" dirty="0"/>
               <a:t>The visualizations include:</a:t>
             </a:r>
           </a:p>
           <a:p>
             <a:pPr lvl="0">
               <a:lnSpc>
-                <a:spcPct val="150000"/>
+                <a:spcPct val="100000"/>
               </a:lnSpc>
             </a:pPr>
             <a:r>
-              <a:rPr lang="en-IN" sz="1600" b="1" dirty="0"/>
+              <a:rPr lang="en-IN" sz="1400" b="1" dirty="0"/>
               <a:t>Property Listings Map</a:t>
             </a:r>
             <a:r>
-              <a:rPr lang="en-IN" sz="1600" dirty="0"/>
+              <a:rPr lang="en-IN" sz="1400" dirty="0"/>
               <a:t> – Displays the geographical distribution of properties. </a:t>
             </a:r>
           </a:p>
           <a:p>
             <a:pPr lvl="0">
               <a:lnSpc>
-                <a:spcPct val="150000"/>
+                <a:spcPct val="100000"/>
               </a:lnSpc>
             </a:pPr>
             <a:r>
-              <a:rPr lang="en-IN" sz="1600" b="1" dirty="0"/>
+              <a:rPr lang="en-IN" sz="1400" b="1" dirty="0"/>
               <a:t>Average Price by City (Bar Chart)</a:t>
             </a:r>
             <a:r>
-              <a:rPr lang="en-IN" sz="1600" dirty="0"/>
+              <a:rPr lang="en-IN" sz="1400" dirty="0"/>
               <a:t> – Compares the average property prices across different cities. </a:t>
             </a:r>
           </a:p>
           <a:p>
             <a:pPr lvl="0">
               <a:lnSpc>
-                <a:spcPct val="150000"/>
+                <a:spcPct val="100000"/>
               </a:lnSpc>
             </a:pPr>
             <a:r>
-              <a:rPr lang="en-IN" sz="1600" b="1" dirty="0"/>
+              <a:rPr lang="en-IN" sz="1400" b="1" dirty="0"/>
               <a:t>Property Type Distribution (Pie Chart)</a:t>
             </a:r>
             <a:r>
-              <a:rPr lang="en-IN" sz="1600" dirty="0"/>
+              <a:rPr lang="en-IN" sz="1400" dirty="0"/>
               <a:t> – Shows the percentage distribution of different property types. </a:t>
             </a:r>
           </a:p>
           <a:p>
             <a:pPr lvl="0">
               <a:lnSpc>
-                <a:spcPct val="150000"/>
+                <a:spcPct val="100000"/>
               </a:lnSpc>
             </a:pPr>
             <a:r>
-              <a:rPr lang="en-IN" sz="1600" b="1" dirty="0"/>
+              <a:rPr lang="en-IN" sz="1400" b="1" dirty="0"/>
               <a:t>Monthly Sales Trend (Line Chart)</a:t>
             </a:r>
             <a:r>
-              <a:rPr lang="en-IN" sz="1600" dirty="0"/>
+              <a:rPr lang="en-IN" sz="1400" dirty="0"/>
               <a:t> – Helps </a:t>
             </a:r>
             <a:r>
-              <a:rPr lang="en-IN" sz="1600" dirty="0" err="1"/>
+              <a:rPr lang="en-IN" sz="1400" dirty="0" err="1"/>
               <a:t>analyze</a:t>
             </a:r>
             <a:r>
-              <a:rPr lang="en-IN" sz="1600" dirty="0"/>
+              <a:rPr lang="en-IN" sz="1400" dirty="0"/>
               <a:t> how property sales change over time. </a:t>
             </a:r>
           </a:p>
           <a:p>
             <a:pPr lvl="0">
               <a:lnSpc>
-                <a:spcPct val="150000"/>
+                <a:spcPct val="100000"/>
               </a:lnSpc>
             </a:pPr>
             <a:r>
-              <a:rPr lang="en-IN" sz="1600" b="1" dirty="0"/>
+              <a:rPr lang="en-IN" sz="1400" b="1" dirty="0"/>
               <a:t>Interactive Data Tables</a:t>
             </a:r>
             <a:r>
-              <a:rPr lang="en-IN" sz="1600" dirty="0"/>
+              <a:rPr lang="en-IN" sz="1400" dirty="0"/>
               <a:t> – Allow users to view and explore the filtered data in tabular format.</a:t>
             </a:r>
           </a:p>
           <a:p>
             <a:pPr>
               <a:lnSpc>
-                <a:spcPct val="150000"/>
+                <a:spcPct val="100000"/>
               </a:lnSpc>
             </a:pPr>
-            <a:endParaRPr lang="en-IN" sz="1600" dirty="0"/>
+            <a:endParaRPr lang="en-IN" sz="1400" dirty="0"/>
           </a:p>
         </p:txBody>
       </p:sp>
+      <p:pic>
+        <p:nvPicPr>
+          <p:cNvPr id="9" name="Picture 8">
+            <a:extLst>
+              <a:ext uri="{FF2B5EF4-FFF2-40B4-BE49-F238E27FC236}">
+                <a16:creationId xmlns:a16="http://schemas.microsoft.com/office/drawing/2014/main" id="{D4BE9C9C-DBFD-F822-FC6B-501DD4C3D504}"/>
+              </a:ext>
+            </a:extLst>
+          </p:cNvPr>
+          <p:cNvPicPr>
+            <a:picLocks noChangeAspect="1"/>
+          </p:cNvPicPr>
+          <p:nvPr/>
+        </p:nvPicPr>
+        <p:blipFill>
+          <a:blip r:embed="rId2"/>
+          <a:stretch>
+            <a:fillRect/>
+          </a:stretch>
+        </p:blipFill>
+        <p:spPr>
+          <a:xfrm>
+            <a:off x="7177548" y="1343875"/>
+            <a:ext cx="4532671" cy="4561900"/>
+          </a:xfrm>
+          <a:prstGeom prst="rect">
+            <a:avLst/>
+          </a:prstGeom>
+        </p:spPr>
+      </p:pic>
     </p:spTree>
     <p:extLst>
       <p:ext uri="{BB962C8B-B14F-4D97-AF65-F5344CB8AC3E}">
@@ -3278,7 +3308,7 @@
         <p:spPr>
           <a:xfrm>
             <a:off x="533459" y="1485932"/>
-            <a:ext cx="11054107" cy="4836209"/>
+            <a:ext cx="5316735" cy="4836209"/>
           </a:xfrm>
           <a:prstGeom prst="rect">
             <a:avLst/>
@@ -3477,7 +3507,14 @@
             </a:r>
             <a:r>
               <a:rPr lang="en-IN" sz="1600" dirty="0"/>
-              <a:t>. CRUD stands for </a:t>
+              <a:t>. </a:t>
+            </a:r>
+            <a:br>
+              <a:rPr lang="en-IN" sz="1600" dirty="0"/>
+            </a:br>
+            <a:r>
+              <a:rPr lang="en-IN" sz="1600" dirty="0"/>
+              <a:t>CRUD stands for </a:t>
             </a:r>
             <a:r>
               <a:rPr lang="en-IN" sz="1600" b="1" dirty="0"/>
@@ -3518,6 +3555,36 @@
           </a:p>
         </p:txBody>
       </p:sp>
+      <p:pic>
+        <p:nvPicPr>
+          <p:cNvPr id="4" name="Picture 3">
+            <a:extLst>
+              <a:ext uri="{FF2B5EF4-FFF2-40B4-BE49-F238E27FC236}">
+                <a16:creationId xmlns:a16="http://schemas.microsoft.com/office/drawing/2014/main" id="{547EE933-640D-FD9B-4904-0D4F10E07E8B}"/>
+              </a:ext>
+            </a:extLst>
+          </p:cNvPr>
+          <p:cNvPicPr>
+            <a:picLocks noChangeAspect="1"/>
+          </p:cNvPicPr>
+          <p:nvPr/>
+        </p:nvPicPr>
+        <p:blipFill>
+          <a:blip r:embed="rId2"/>
+          <a:stretch>
+            <a:fillRect/>
+          </a:stretch>
+        </p:blipFill>
+        <p:spPr>
+          <a:xfrm>
+            <a:off x="5850194" y="1790740"/>
+            <a:ext cx="5737372" cy="2850094"/>
+          </a:xfrm>
+          <a:prstGeom prst="rect">
+            <a:avLst/>
+          </a:prstGeom>
+        </p:spPr>
+      </p:pic>
     </p:spTree>
     <p:extLst>
       <p:ext uri="{BB962C8B-B14F-4D97-AF65-F5344CB8AC3E}">
@@ -3608,7 +3675,7 @@
         <p:spPr>
           <a:xfrm>
             <a:off x="533459" y="1485932"/>
-            <a:ext cx="11054107" cy="4836209"/>
+            <a:ext cx="5926335" cy="5072184"/>
           </a:xfrm>
           <a:prstGeom prst="rect">
             <a:avLst/>
@@ -3852,6 +3919,36 @@
           </a:p>
         </p:txBody>
       </p:sp>
+      <p:pic>
+        <p:nvPicPr>
+          <p:cNvPr id="4" name="Picture 3">
+            <a:extLst>
+              <a:ext uri="{FF2B5EF4-FFF2-40B4-BE49-F238E27FC236}">
+                <a16:creationId xmlns:a16="http://schemas.microsoft.com/office/drawing/2014/main" id="{AF226B9A-095D-0237-5DEE-5077BCBBC4D9}"/>
+              </a:ext>
+            </a:extLst>
+          </p:cNvPr>
+          <p:cNvPicPr>
+            <a:picLocks noChangeAspect="1"/>
+          </p:cNvPicPr>
+          <p:nvPr/>
+        </p:nvPicPr>
+        <p:blipFill>
+          <a:blip r:embed="rId2"/>
+          <a:stretch>
+            <a:fillRect/>
+          </a:stretch>
+        </p:blipFill>
+        <p:spPr>
+          <a:xfrm>
+            <a:off x="6459794" y="2104101"/>
+            <a:ext cx="5466735" cy="3274143"/>
+          </a:xfrm>
+          <a:prstGeom prst="rect">
+            <a:avLst/>
+          </a:prstGeom>
+        </p:spPr>
+      </p:pic>
     </p:spTree>
     <p:extLst>
       <p:ext uri="{BB962C8B-B14F-4D97-AF65-F5344CB8AC3E}">
@@ -4460,7 +4557,7 @@
               <a:buNone/>
             </a:pPr>
             <a:r>
-              <a:rPr lang="en-US" sz="1600" b="1" dirty="0">
+              <a:rPr lang="en-US" sz="1600" b="1">
                 <a:solidFill>
                   <a:prstClr val="black">
                     <a:lumMod val="75000"/>
@@ -4470,7 +4567,20 @@
                 <a:latin typeface="Segoe UI" panose="020B0502040204020203" pitchFamily="34" charset="0"/>
                 <a:cs typeface="Segoe UI" panose="020B0502040204020203" pitchFamily="34" charset="0"/>
               </a:rPr>
-              <a:t>Good afternoon, everyone</a:t>
+              <a:t>Good evening, </a:t>
+            </a:r>
+            <a:r>
+              <a:rPr lang="en-US" sz="1600" b="1" dirty="0">
+                <a:solidFill>
+                  <a:prstClr val="black">
+                    <a:lumMod val="75000"/>
+                    <a:lumOff val="25000"/>
+                  </a:prstClr>
+                </a:solidFill>
+                <a:latin typeface="Segoe UI" panose="020B0502040204020203" pitchFamily="34" charset="0"/>
+                <a:cs typeface="Segoe UI" panose="020B0502040204020203" pitchFamily="34" charset="0"/>
+              </a:rPr>
+              <a:t>everyone</a:t>
             </a:r>
           </a:p>
           <a:p>
@@ -7233,13 +7343,13 @@
           <p:nvPr>
             <p:extLst>
               <p:ext uri="{D42A27DB-BD31-4B8C-83A1-F6EECF244321}">
-                <p14:modId xmlns:p14="http://schemas.microsoft.com/office/powerpoint/2010/main" val="1038459259"/>
+                <p14:modId xmlns:p14="http://schemas.microsoft.com/office/powerpoint/2010/main" val="1975548109"/>
               </p:ext>
             </p:extLst>
           </p:nvPr>
         </p:nvGraphicFramePr>
         <p:xfrm>
-          <a:off x="802712" y="1822465"/>
+          <a:off x="812544" y="1822465"/>
           <a:ext cx="7181082" cy="2011680"/>
         </p:xfrm>
         <a:graphic>
@@ -7974,13 +8084,7 @@
   <p:cSld>
     <p:spTree>
       <p:nvGrpSpPr>
-        <p:cNvPr id="1" name="">
-          <a:extLst>
-            <a:ext uri="{FF2B5EF4-FFF2-40B4-BE49-F238E27FC236}">
-              <a16:creationId xmlns:a16="http://schemas.microsoft.com/office/drawing/2014/main" id="{94223101-F7C6-0CC0-1835-40633C1308F2}"/>
-            </a:ext>
-          </a:extLst>
-        </p:cNvPr>
+        <p:cNvPr id="1" name=""/>
         <p:cNvGrpSpPr/>
         <p:nvPr/>
       </p:nvGrpSpPr>
@@ -7994,10 +8098,182 @@
       </p:grpSpPr>
       <p:sp>
         <p:nvSpPr>
-          <p:cNvPr id="2" name="Title 1">
+          <p:cNvPr id="2" name="Content Placeholder 1">
             <a:extLst>
               <a:ext uri="{FF2B5EF4-FFF2-40B4-BE49-F238E27FC236}">
-                <a16:creationId xmlns:a16="http://schemas.microsoft.com/office/drawing/2014/main" id="{EEEB35D6-09DE-316C-FF4F-47E3BBF37710}"/>
+                <a16:creationId xmlns:a16="http://schemas.microsoft.com/office/drawing/2014/main" id="{8B0DA053-1829-DEB7-D641-56B8996AD78E}"/>
+              </a:ext>
+            </a:extLst>
+          </p:cNvPr>
+          <p:cNvSpPr>
+            <a:spLocks noGrp="1"/>
+          </p:cNvSpPr>
+          <p:nvPr>
+            <p:ph idx="1"/>
+          </p:nvPr>
+        </p:nvSpPr>
+        <p:spPr>
+          <a:xfrm>
+            <a:off x="688009" y="2184535"/>
+            <a:ext cx="6017591" cy="3992429"/>
+          </a:xfrm>
+        </p:spPr>
+        <p:txBody>
+          <a:bodyPr>
+            <a:normAutofit fontScale="25000" lnSpcReduction="20000"/>
+          </a:bodyPr>
+          <a:lstStyle/>
+          <a:p>
+            <a:pPr>
+              <a:buNone/>
+            </a:pPr>
+            <a:endParaRPr lang="en-IN" dirty="0"/>
+          </a:p>
+          <a:p>
+            <a:pPr>
+              <a:buNone/>
+            </a:pPr>
+            <a:endParaRPr lang="en-IN" dirty="0"/>
+          </a:p>
+          <a:p>
+            <a:pPr>
+              <a:buNone/>
+            </a:pPr>
+            <a:r>
+              <a:rPr lang="en-IN" sz="5600" dirty="0"/>
+              <a:t>At the top of the dashboard, I have displayed five important Key Performance Indicators (KPIs):</a:t>
+            </a:r>
+          </a:p>
+          <a:p>
+            <a:pPr lvl="0">
+              <a:lnSpc>
+                <a:spcPct val="110000"/>
+              </a:lnSpc>
+            </a:pPr>
+            <a:r>
+              <a:rPr lang="en-IN" sz="5600" b="1" dirty="0"/>
+              <a:t>Total Listings</a:t>
+            </a:r>
+            <a:r>
+              <a:rPr lang="en-IN" sz="5600" dirty="0"/>
+              <a:t> – Shows the total number of properties available in the system. </a:t>
+            </a:r>
+          </a:p>
+          <a:p>
+            <a:pPr lvl="0">
+              <a:lnSpc>
+                <a:spcPct val="110000"/>
+              </a:lnSpc>
+            </a:pPr>
+            <a:r>
+              <a:rPr lang="en-IN" sz="5600" b="1" dirty="0"/>
+              <a:t>Total Sales</a:t>
+            </a:r>
+            <a:r>
+              <a:rPr lang="en-IN" sz="5600" dirty="0"/>
+              <a:t> – Displays the total number of properties that have been sold. </a:t>
+            </a:r>
+          </a:p>
+          <a:p>
+            <a:pPr lvl="0">
+              <a:lnSpc>
+                <a:spcPct val="110000"/>
+              </a:lnSpc>
+            </a:pPr>
+            <a:r>
+              <a:rPr lang="en-IN" sz="5600" b="1" dirty="0"/>
+              <a:t>Total Buyers</a:t>
+            </a:r>
+            <a:r>
+              <a:rPr lang="en-IN" sz="5600" dirty="0"/>
+              <a:t> – Indicates the total number of registered buyers. </a:t>
+            </a:r>
+          </a:p>
+          <a:p>
+            <a:pPr lvl="0">
+              <a:lnSpc>
+                <a:spcPct val="110000"/>
+              </a:lnSpc>
+            </a:pPr>
+            <a:r>
+              <a:rPr lang="en-IN" sz="5600" b="1" dirty="0"/>
+              <a:t>Total Agents</a:t>
+            </a:r>
+            <a:r>
+              <a:rPr lang="en-IN" sz="5600" dirty="0"/>
+              <a:t> – Shows the number of real estate agents managing the properties. </a:t>
+            </a:r>
+          </a:p>
+          <a:p>
+            <a:pPr lvl="0">
+              <a:lnSpc>
+                <a:spcPct val="110000"/>
+              </a:lnSpc>
+            </a:pPr>
+            <a:r>
+              <a:rPr lang="en-IN" sz="5600" b="1" dirty="0"/>
+              <a:t>Total Revenue</a:t>
+            </a:r>
+            <a:r>
+              <a:rPr lang="en-IN" sz="5600" dirty="0"/>
+              <a:t> – Displays the overall revenue generated from property sales.</a:t>
+            </a:r>
+          </a:p>
+          <a:p>
+            <a:pPr>
+              <a:buNone/>
+            </a:pPr>
+            <a:endParaRPr lang="en-IN" dirty="0"/>
+          </a:p>
+          <a:p>
+            <a:pPr>
+              <a:buNone/>
+            </a:pPr>
+            <a:endParaRPr lang="en-IN" dirty="0"/>
+          </a:p>
+          <a:p>
+            <a:endParaRPr lang="en-IN" dirty="0"/>
+          </a:p>
+        </p:txBody>
+      </p:sp>
+      <p:pic>
+        <p:nvPicPr>
+          <p:cNvPr id="8" name="Content Placeholder 7">
+            <a:extLst>
+              <a:ext uri="{FF2B5EF4-FFF2-40B4-BE49-F238E27FC236}">
+                <a16:creationId xmlns:a16="http://schemas.microsoft.com/office/drawing/2014/main" id="{63D99886-A1DF-1029-C631-8E4C60446465}"/>
+              </a:ext>
+            </a:extLst>
+          </p:cNvPr>
+          <p:cNvPicPr>
+            <a:picLocks noGrp="1" noChangeAspect="1"/>
+          </p:cNvPicPr>
+          <p:nvPr>
+            <p:ph idx="13"/>
+          </p:nvPr>
+        </p:nvPicPr>
+        <p:blipFill>
+          <a:blip r:embed="rId2"/>
+          <a:stretch>
+            <a:fillRect/>
+          </a:stretch>
+        </p:blipFill>
+        <p:spPr>
+          <a:xfrm>
+            <a:off x="6853084" y="2424916"/>
+            <a:ext cx="4686454" cy="3169373"/>
+          </a:xfrm>
+          <a:prstGeom prst="rect">
+            <a:avLst/>
+          </a:prstGeom>
+        </p:spPr>
+      </p:pic>
+      <p:sp>
+        <p:nvSpPr>
+          <p:cNvPr id="4" name="Title 3">
+            <a:extLst>
+              <a:ext uri="{FF2B5EF4-FFF2-40B4-BE49-F238E27FC236}">
+                <a16:creationId xmlns:a16="http://schemas.microsoft.com/office/drawing/2014/main" id="{67451F38-A20F-F653-150E-C081F4168ECA}"/>
               </a:ext>
             </a:extLst>
           </p:cNvPr>
@@ -8025,16 +8301,16 @@
               </a:rPr>
               <a:t>Dashboard</a:t>
             </a:r>
-            <a:endParaRPr lang="en-US" dirty="0"/>
+            <a:endParaRPr lang="en-IN" dirty="0"/>
           </a:p>
         </p:txBody>
       </p:sp>
       <p:sp>
         <p:nvSpPr>
-          <p:cNvPr id="6" name="Content Placeholder 7" descr="PowerPoint allows you to import a variety of popular 3D model formats. &#10;So no matter your workflows outside of PowerPoint, you should be able to find a suitable solution to make your 3D models portable and presentable to virtually anyone, anywhere and on any device (with just a few quick modifications)">
+          <p:cNvPr id="6" name="Title 3">
             <a:extLst>
               <a:ext uri="{FF2B5EF4-FFF2-40B4-BE49-F238E27FC236}">
-                <a16:creationId xmlns:a16="http://schemas.microsoft.com/office/drawing/2014/main" id="{4DE0B3FE-C5C7-537A-CDAD-66E60D9C8178}"/>
+                <a16:creationId xmlns:a16="http://schemas.microsoft.com/office/drawing/2014/main" id="{FFBA73FA-38A8-3137-3908-EB6B9664F7F2}"/>
               </a:ext>
             </a:extLst>
           </p:cNvPr>
@@ -8045,288 +8321,67 @@
         </p:nvSpPr>
         <p:spPr>
           <a:xfrm>
-            <a:off x="533459" y="1485932"/>
-            <a:ext cx="11054107" cy="4836209"/>
+            <a:off x="688010" y="1436772"/>
+            <a:ext cx="10983132" cy="747763"/>
           </a:xfrm>
           <a:prstGeom prst="rect">
             <a:avLst/>
           </a:prstGeom>
         </p:spPr>
         <p:txBody>
-          <a:bodyPr vert="horz" lIns="91440" tIns="45720" rIns="91440" bIns="45720" rtlCol="0">
-            <a:noAutofit/>
+          <a:bodyPr vert="horz" lIns="91440" tIns="45720" rIns="91440" bIns="45720" rtlCol="0" anchor="ctr" anchorCtr="0">
+            <a:normAutofit fontScale="55000" lnSpcReduction="20000"/>
           </a:bodyPr>
           <a:lstStyle>
-            <a:lvl1pPr marL="228600" indent="-228600" algn="l" defTabSz="914400" rtl="0" eaLnBrk="1" latinLnBrk="0" hangingPunct="1">
+            <a:lvl1pPr algn="l" defTabSz="914400" rtl="0" eaLnBrk="1" latinLnBrk="0" hangingPunct="1">
               <a:lnSpc>
                 <a:spcPct val="90000"/>
               </a:lnSpc>
               <a:spcBef>
-                <a:spcPts val="1000"/>
+                <a:spcPct val="0"/>
               </a:spcBef>
-              <a:buFont typeface="Arial" panose="020B0604020202020204" pitchFamily="34" charset="0"/>
-              <a:buChar char="•"/>
-              <a:defRPr sz="2800" kern="1200">
-                <a:solidFill>
-                  <a:schemeClr val="tx1"/>
-                </a:solidFill>
+              <a:buNone/>
+              <a:defRPr lang="en-US" sz="2800" kern="1200">
+                <a:solidFill>
+                  <a:schemeClr val="bg2">
+                    <a:lumMod val="25000"/>
+                  </a:schemeClr>
+                </a:solidFill>
+                <a:latin typeface="+mj-lt"/>
+                <a:ea typeface="+mj-ea"/>
+                <a:cs typeface="+mj-cs"/>
+              </a:defRPr>
+            </a:lvl1pPr>
+          </a:lstStyle>
+          <a:p>
+            <a:pPr>
+              <a:lnSpc>
+                <a:spcPct val="150000"/>
+              </a:lnSpc>
+            </a:pPr>
+            <a:r>
+              <a:rPr lang="en-IN" dirty="0">
                 <a:latin typeface="+mn-lt"/>
-                <a:ea typeface="+mn-ea"/>
-                <a:cs typeface="+mn-cs"/>
-              </a:defRPr>
-            </a:lvl1pPr>
-            <a:lvl2pPr marL="685800" indent="-228600" algn="l" defTabSz="914400" rtl="0" eaLnBrk="1" latinLnBrk="0" hangingPunct="1">
-              <a:lnSpc>
-                <a:spcPct val="90000"/>
-              </a:lnSpc>
-              <a:spcBef>
-                <a:spcPts val="500"/>
-              </a:spcBef>
-              <a:buFont typeface="Arial" panose="020B0604020202020204" pitchFamily="34" charset="0"/>
-              <a:buChar char="•"/>
-              <a:defRPr sz="2400" kern="1200">
-                <a:solidFill>
-                  <a:schemeClr val="tx1"/>
-                </a:solidFill>
+              </a:rPr>
+              <a:t>This is the main dashboard of the </a:t>
+            </a:r>
+            <a:r>
+              <a:rPr lang="en-IN" b="1" dirty="0" err="1">
                 <a:latin typeface="+mn-lt"/>
-                <a:ea typeface="+mn-ea"/>
-                <a:cs typeface="+mn-cs"/>
-              </a:defRPr>
-            </a:lvl2pPr>
-            <a:lvl3pPr marL="1143000" indent="-228600" algn="l" defTabSz="914400" rtl="0" eaLnBrk="1" latinLnBrk="0" hangingPunct="1">
-              <a:lnSpc>
-                <a:spcPct val="90000"/>
-              </a:lnSpc>
-              <a:spcBef>
-                <a:spcPts val="500"/>
-              </a:spcBef>
-              <a:buFont typeface="Arial" panose="020B0604020202020204" pitchFamily="34" charset="0"/>
-              <a:buChar char="•"/>
-              <a:defRPr sz="2000" kern="1200">
-                <a:solidFill>
-                  <a:schemeClr val="tx1"/>
-                </a:solidFill>
+              </a:rPr>
+              <a:t>BrickView</a:t>
+            </a:r>
+            <a:r>
+              <a:rPr lang="en-IN" b="1" dirty="0">
                 <a:latin typeface="+mn-lt"/>
-                <a:ea typeface="+mn-ea"/>
-                <a:cs typeface="+mn-cs"/>
-              </a:defRPr>
-            </a:lvl3pPr>
-            <a:lvl4pPr marL="1600200" indent="-228600" algn="l" defTabSz="914400" rtl="0" eaLnBrk="1" latinLnBrk="0" hangingPunct="1">
-              <a:lnSpc>
-                <a:spcPct val="90000"/>
-              </a:lnSpc>
-              <a:spcBef>
-                <a:spcPts val="500"/>
-              </a:spcBef>
-              <a:buFont typeface="Arial" panose="020B0604020202020204" pitchFamily="34" charset="0"/>
-              <a:buChar char="•"/>
-              <a:defRPr sz="1800" kern="1200">
-                <a:solidFill>
-                  <a:schemeClr val="tx1"/>
-                </a:solidFill>
+              </a:rPr>
+              <a:t> Real Estate Analytics Platform</a:t>
+            </a:r>
+            <a:r>
+              <a:rPr lang="en-IN" dirty="0">
                 <a:latin typeface="+mn-lt"/>
-                <a:ea typeface="+mn-ea"/>
-                <a:cs typeface="+mn-cs"/>
-              </a:defRPr>
-            </a:lvl4pPr>
-            <a:lvl5pPr marL="2057400" indent="-228600" algn="l" defTabSz="914400" rtl="0" eaLnBrk="1" latinLnBrk="0" hangingPunct="1">
-              <a:lnSpc>
-                <a:spcPct val="90000"/>
-              </a:lnSpc>
-              <a:spcBef>
-                <a:spcPts val="500"/>
-              </a:spcBef>
-              <a:buFont typeface="Arial" panose="020B0604020202020204" pitchFamily="34" charset="0"/>
-              <a:buChar char="•"/>
-              <a:defRPr sz="1800" kern="1200">
-                <a:solidFill>
-                  <a:schemeClr val="tx1"/>
-                </a:solidFill>
-                <a:latin typeface="+mn-lt"/>
-                <a:ea typeface="+mn-ea"/>
-                <a:cs typeface="+mn-cs"/>
-              </a:defRPr>
-            </a:lvl5pPr>
-            <a:lvl6pPr marL="2514600" indent="-228600" algn="l" defTabSz="914400" rtl="0" eaLnBrk="1" latinLnBrk="0" hangingPunct="1">
-              <a:lnSpc>
-                <a:spcPct val="90000"/>
-              </a:lnSpc>
-              <a:spcBef>
-                <a:spcPts val="500"/>
-              </a:spcBef>
-              <a:buFont typeface="Arial" panose="020B0604020202020204" pitchFamily="34" charset="0"/>
-              <a:buChar char="•"/>
-              <a:defRPr sz="1800" kern="1200">
-                <a:solidFill>
-                  <a:schemeClr val="tx1"/>
-                </a:solidFill>
-                <a:latin typeface="+mn-lt"/>
-                <a:ea typeface="+mn-ea"/>
-                <a:cs typeface="+mn-cs"/>
-              </a:defRPr>
-            </a:lvl6pPr>
-            <a:lvl7pPr marL="2971800" indent="-228600" algn="l" defTabSz="914400" rtl="0" eaLnBrk="1" latinLnBrk="0" hangingPunct="1">
-              <a:lnSpc>
-                <a:spcPct val="90000"/>
-              </a:lnSpc>
-              <a:spcBef>
-                <a:spcPts val="500"/>
-              </a:spcBef>
-              <a:buFont typeface="Arial" panose="020B0604020202020204" pitchFamily="34" charset="0"/>
-              <a:buChar char="•"/>
-              <a:defRPr sz="1800" kern="1200">
-                <a:solidFill>
-                  <a:schemeClr val="tx1"/>
-                </a:solidFill>
-                <a:latin typeface="+mn-lt"/>
-                <a:ea typeface="+mn-ea"/>
-                <a:cs typeface="+mn-cs"/>
-              </a:defRPr>
-            </a:lvl7pPr>
-            <a:lvl8pPr marL="3429000" indent="-228600" algn="l" defTabSz="914400" rtl="0" eaLnBrk="1" latinLnBrk="0" hangingPunct="1">
-              <a:lnSpc>
-                <a:spcPct val="90000"/>
-              </a:lnSpc>
-              <a:spcBef>
-                <a:spcPts val="500"/>
-              </a:spcBef>
-              <a:buFont typeface="Arial" panose="020B0604020202020204" pitchFamily="34" charset="0"/>
-              <a:buChar char="•"/>
-              <a:defRPr sz="1800" kern="1200">
-                <a:solidFill>
-                  <a:schemeClr val="tx1"/>
-                </a:solidFill>
-                <a:latin typeface="+mn-lt"/>
-                <a:ea typeface="+mn-ea"/>
-                <a:cs typeface="+mn-cs"/>
-              </a:defRPr>
-            </a:lvl8pPr>
-            <a:lvl9pPr marL="3886200" indent="-228600" algn="l" defTabSz="914400" rtl="0" eaLnBrk="1" latinLnBrk="0" hangingPunct="1">
-              <a:lnSpc>
-                <a:spcPct val="90000"/>
-              </a:lnSpc>
-              <a:spcBef>
-                <a:spcPts val="500"/>
-              </a:spcBef>
-              <a:buFont typeface="Arial" panose="020B0604020202020204" pitchFamily="34" charset="0"/>
-              <a:buChar char="•"/>
-              <a:defRPr sz="1800" kern="1200">
-                <a:solidFill>
-                  <a:schemeClr val="tx1"/>
-                </a:solidFill>
-                <a:latin typeface="+mn-lt"/>
-                <a:ea typeface="+mn-ea"/>
-                <a:cs typeface="+mn-cs"/>
-              </a:defRPr>
-            </a:lvl9pPr>
-          </a:lstStyle>
-          <a:p>
-            <a:pPr>
-              <a:lnSpc>
-                <a:spcPct val="150000"/>
-              </a:lnSpc>
-            </a:pPr>
-            <a:r>
-              <a:rPr lang="en-IN" sz="1600" dirty="0"/>
-              <a:t>This is the main dashboard of the </a:t>
-            </a:r>
-            <a:r>
-              <a:rPr lang="en-IN" sz="1600" b="1" dirty="0" err="1"/>
-              <a:t>BrickView</a:t>
-            </a:r>
-            <a:r>
-              <a:rPr lang="en-IN" sz="1600" b="1" dirty="0"/>
-              <a:t> Real Estate Analytics Platform</a:t>
-            </a:r>
-            <a:r>
-              <a:rPr lang="en-IN" sz="1600" dirty="0"/>
+              </a:rPr>
               <a:t>. The dashboard is designed to provide users with a quick overview of the real estate data through Key Performance Indicators, interactive filters, and visualizations.</a:t>
-            </a:r>
-          </a:p>
-          <a:p>
-            <a:pPr>
-              <a:lnSpc>
-                <a:spcPct val="150000"/>
-              </a:lnSpc>
-            </a:pPr>
-            <a:r>
-              <a:rPr lang="en-IN" sz="1600" dirty="0"/>
-              <a:t>At the top of the dashboard, I have displayed five important Key Performance Indicators (KPIs):</a:t>
-            </a:r>
-          </a:p>
-          <a:p>
-            <a:pPr lvl="0">
-              <a:lnSpc>
-                <a:spcPct val="150000"/>
-              </a:lnSpc>
-            </a:pPr>
-            <a:r>
-              <a:rPr lang="en-IN" sz="1600" b="1" dirty="0"/>
-              <a:t>Total Listings</a:t>
-            </a:r>
-            <a:r>
-              <a:rPr lang="en-IN" sz="1600" dirty="0"/>
-              <a:t> – Shows the total number of properties available in the system. </a:t>
-            </a:r>
-          </a:p>
-          <a:p>
-            <a:pPr lvl="0">
-              <a:lnSpc>
-                <a:spcPct val="150000"/>
-              </a:lnSpc>
-            </a:pPr>
-            <a:r>
-              <a:rPr lang="en-IN" sz="1600" b="1" dirty="0"/>
-              <a:t>Total Sales</a:t>
-            </a:r>
-            <a:r>
-              <a:rPr lang="en-IN" sz="1600" dirty="0"/>
-              <a:t> – Displays the total number of properties that have been sold. </a:t>
-            </a:r>
-          </a:p>
-          <a:p>
-            <a:pPr lvl="0">
-              <a:lnSpc>
-                <a:spcPct val="150000"/>
-              </a:lnSpc>
-            </a:pPr>
-            <a:r>
-              <a:rPr lang="en-IN" sz="1600" b="1" dirty="0"/>
-              <a:t>Total Buyers</a:t>
-            </a:r>
-            <a:r>
-              <a:rPr lang="en-IN" sz="1600" dirty="0"/>
-              <a:t> – Indicates the total number of registered buyers. </a:t>
-            </a:r>
-          </a:p>
-          <a:p>
-            <a:pPr lvl="0">
-              <a:lnSpc>
-                <a:spcPct val="150000"/>
-              </a:lnSpc>
-            </a:pPr>
-            <a:r>
-              <a:rPr lang="en-IN" sz="1600" b="1" dirty="0"/>
-              <a:t>Total Agents</a:t>
-            </a:r>
-            <a:r>
-              <a:rPr lang="en-IN" sz="1600" dirty="0"/>
-              <a:t> – Shows the number of real estate agents managing the properties. </a:t>
-            </a:r>
-          </a:p>
-          <a:p>
-            <a:pPr lvl="0">
-              <a:lnSpc>
-                <a:spcPct val="150000"/>
-              </a:lnSpc>
-            </a:pPr>
-            <a:r>
-              <a:rPr lang="en-IN" sz="1600" b="1" dirty="0"/>
-              <a:t>Total Revenue</a:t>
-            </a:r>
-            <a:r>
-              <a:rPr lang="en-IN" sz="1600" dirty="0"/>
-              <a:t> – Displays the overall revenue generated from property sales.</a:t>
             </a:r>
           </a:p>
         </p:txBody>
@@ -8334,7 +8389,7 @@
     </p:spTree>
     <p:extLst>
       <p:ext uri="{BB962C8B-B14F-4D97-AF65-F5344CB8AC3E}">
-        <p14:creationId xmlns:p14="http://schemas.microsoft.com/office/powerpoint/2010/main" val="1866138496"/>
+        <p14:creationId xmlns:p14="http://schemas.microsoft.com/office/powerpoint/2010/main" val="3478920436"/>
       </p:ext>
     </p:extLst>
   </p:cSld>
@@ -8352,7 +8407,7 @@
         <p:cNvPr id="1" name="">
           <a:extLst>
             <a:ext uri="{FF2B5EF4-FFF2-40B4-BE49-F238E27FC236}">
-              <a16:creationId xmlns:a16="http://schemas.microsoft.com/office/drawing/2014/main" id="{D877A8BA-96BB-1ECF-EA75-1ED4191B06A7}"/>
+              <a16:creationId xmlns:a16="http://schemas.microsoft.com/office/drawing/2014/main" id="{4A9E1843-EC3D-4E18-5441-798E5D19F4D2}"/>
             </a:ext>
           </a:extLst>
         </p:cNvPr>
@@ -8369,10 +8424,167 @@
       </p:grpSpPr>
       <p:sp>
         <p:nvSpPr>
-          <p:cNvPr id="2" name="Title 1">
+          <p:cNvPr id="2" name="Content Placeholder 1">
             <a:extLst>
               <a:ext uri="{FF2B5EF4-FFF2-40B4-BE49-F238E27FC236}">
-                <a16:creationId xmlns:a16="http://schemas.microsoft.com/office/drawing/2014/main" id="{26EE15D6-2B70-95BC-3C85-8BDEE474EC4B}"/>
+                <a16:creationId xmlns:a16="http://schemas.microsoft.com/office/drawing/2014/main" id="{D04ECF0D-289E-A7C9-D571-256D6A820C21}"/>
+              </a:ext>
+            </a:extLst>
+          </p:cNvPr>
+          <p:cNvSpPr>
+            <a:spLocks noGrp="1"/>
+          </p:cNvSpPr>
+          <p:nvPr>
+            <p:ph idx="1"/>
+          </p:nvPr>
+        </p:nvSpPr>
+        <p:spPr>
+          <a:xfrm>
+            <a:off x="688009" y="2184535"/>
+            <a:ext cx="6332223" cy="3992429"/>
+          </a:xfrm>
+        </p:spPr>
+        <p:txBody>
+          <a:bodyPr>
+            <a:noAutofit/>
+          </a:bodyPr>
+          <a:lstStyle/>
+          <a:p>
+            <a:pPr>
+              <a:buNone/>
+            </a:pPr>
+            <a:endParaRPr lang="en-IN" sz="1000" dirty="0"/>
+          </a:p>
+          <a:p>
+            <a:pPr>
+              <a:buNone/>
+            </a:pPr>
+            <a:endParaRPr lang="en-IN" sz="1000" dirty="0"/>
+          </a:p>
+          <a:p>
+            <a:pPr>
+              <a:buNone/>
+            </a:pPr>
+            <a:br>
+              <a:rPr lang="en-IN" sz="1400" dirty="0"/>
+            </a:br>
+            <a:r>
+              <a:rPr lang="en-IN" sz="1400" dirty="0"/>
+              <a:t>The available filters are:</a:t>
+            </a:r>
+            <a:br>
+              <a:rPr lang="en-IN" sz="1400" dirty="0"/>
+            </a:br>
+            <a:r>
+              <a:rPr lang="en-IN" sz="1400" b="1" dirty="0"/>
+              <a:t>City</a:t>
+            </a:r>
+            <a:r>
+              <a:rPr lang="en-IN" sz="1400" dirty="0"/>
+              <a:t> – View properties from a specific city. </a:t>
+            </a:r>
+            <a:br>
+              <a:rPr lang="en-IN" sz="1400" dirty="0"/>
+            </a:br>
+            <a:r>
+              <a:rPr lang="en-IN" sz="1400" b="1" dirty="0"/>
+              <a:t>Property Type</a:t>
+            </a:r>
+            <a:r>
+              <a:rPr lang="en-IN" sz="1400" dirty="0"/>
+              <a:t> – Filter properties such as apartments, villas, or commercial properties. </a:t>
+            </a:r>
+            <a:br>
+              <a:rPr lang="en-IN" sz="1400" dirty="0"/>
+            </a:br>
+            <a:r>
+              <a:rPr lang="en-IN" sz="1400" b="1" dirty="0"/>
+              <a:t>Price Range</a:t>
+            </a:r>
+            <a:r>
+              <a:rPr lang="en-IN" sz="1400" dirty="0"/>
+              <a:t> – </a:t>
+            </a:r>
+            <a:r>
+              <a:rPr lang="en-IN" sz="1400" dirty="0" err="1"/>
+              <a:t>Analyze</a:t>
+            </a:r>
+            <a:r>
+              <a:rPr lang="en-IN" sz="1400" dirty="0"/>
+              <a:t> properties within a selected budget. </a:t>
+            </a:r>
+            <a:br>
+              <a:rPr lang="en-IN" sz="1400" dirty="0"/>
+            </a:br>
+            <a:r>
+              <a:rPr lang="en-IN" sz="1400" b="1" dirty="0"/>
+              <a:t>Agent</a:t>
+            </a:r>
+            <a:r>
+              <a:rPr lang="en-IN" sz="1400" dirty="0"/>
+              <a:t> – Display properties managed by a particular real estate agent. </a:t>
+            </a:r>
+            <a:br>
+              <a:rPr lang="en-IN" sz="1400" dirty="0"/>
+            </a:br>
+            <a:r>
+              <a:rPr lang="en-IN" sz="1400" b="1" dirty="0"/>
+              <a:t>Listed Date</a:t>
+            </a:r>
+            <a:r>
+              <a:rPr lang="en-IN" sz="1400" dirty="0"/>
+              <a:t> – Filter properties based on their listing date. </a:t>
+            </a:r>
+            <a:br>
+              <a:rPr lang="en-IN" sz="1400" dirty="0"/>
+            </a:br>
+            <a:r>
+              <a:rPr lang="en-IN" sz="1400" b="1" dirty="0"/>
+              <a:t>Sale Date</a:t>
+            </a:r>
+            <a:r>
+              <a:rPr lang="en-IN" sz="1400" dirty="0"/>
+              <a:t> – </a:t>
+            </a:r>
+            <a:r>
+              <a:rPr lang="en-IN" sz="1400" dirty="0" err="1"/>
+              <a:t>Analyze</a:t>
+            </a:r>
+            <a:r>
+              <a:rPr lang="en-IN" sz="1400" dirty="0"/>
+              <a:t> properties sold during a selected time period. </a:t>
+            </a:r>
+            <a:br>
+              <a:rPr lang="en-IN" sz="1400" dirty="0"/>
+            </a:br>
+            <a:r>
+              <a:rPr lang="en-IN" sz="1400" dirty="0"/>
+              <a:t>Whenever a filter is applied, the dashboard dynamically updates the displayed property listings and analytics, allowing users to perform focused data exploration</a:t>
+            </a:r>
+          </a:p>
+          <a:p>
+            <a:pPr>
+              <a:buNone/>
+            </a:pPr>
+            <a:endParaRPr lang="en-IN" sz="1000" dirty="0"/>
+          </a:p>
+          <a:p>
+            <a:pPr>
+              <a:buNone/>
+            </a:pPr>
+            <a:endParaRPr lang="en-IN" sz="1000" dirty="0"/>
+          </a:p>
+          <a:p>
+            <a:endParaRPr lang="en-IN" sz="1000" dirty="0"/>
+          </a:p>
+        </p:txBody>
+      </p:sp>
+      <p:sp>
+        <p:nvSpPr>
+          <p:cNvPr id="4" name="Title 3">
+            <a:extLst>
+              <a:ext uri="{FF2B5EF4-FFF2-40B4-BE49-F238E27FC236}">
+                <a16:creationId xmlns:a16="http://schemas.microsoft.com/office/drawing/2014/main" id="{C92AE9BC-20D0-6F36-0182-469D27C95F44}"/>
               </a:ext>
             </a:extLst>
           </p:cNvPr>
@@ -8400,16 +8612,16 @@
               </a:rPr>
               <a:t>Filters &amp; Explorer</a:t>
             </a:r>
-            <a:endParaRPr lang="en-US" dirty="0"/>
+            <a:endParaRPr lang="en-IN" dirty="0"/>
           </a:p>
         </p:txBody>
       </p:sp>
       <p:sp>
         <p:nvSpPr>
-          <p:cNvPr id="6" name="Content Placeholder 7" descr="PowerPoint allows you to import a variety of popular 3D model formats. &#10;So no matter your workflows outside of PowerPoint, you should be able to find a suitable solution to make your 3D models portable and presentable to virtually anyone, anywhere and on any device (with just a few quick modifications)">
+          <p:cNvPr id="6" name="Title 3">
             <a:extLst>
               <a:ext uri="{FF2B5EF4-FFF2-40B4-BE49-F238E27FC236}">
-                <a16:creationId xmlns:a16="http://schemas.microsoft.com/office/drawing/2014/main" id="{5F2083A8-94CF-4CFB-5A91-8031B5F9E4A4}"/>
+                <a16:creationId xmlns:a16="http://schemas.microsoft.com/office/drawing/2014/main" id="{E3133F98-9342-5AB1-0BAB-B96A9CE99066}"/>
               </a:ext>
             </a:extLst>
           </p:cNvPr>
@@ -8420,338 +8632,87 @@
         </p:nvSpPr>
         <p:spPr>
           <a:xfrm>
-            <a:off x="533459" y="1485932"/>
-            <a:ext cx="11054107" cy="4836209"/>
+            <a:off x="688010" y="1436772"/>
+            <a:ext cx="10983132" cy="747763"/>
           </a:xfrm>
           <a:prstGeom prst="rect">
             <a:avLst/>
           </a:prstGeom>
         </p:spPr>
         <p:txBody>
-          <a:bodyPr vert="horz" lIns="91440" tIns="45720" rIns="91440" bIns="45720" rtlCol="0">
-            <a:noAutofit/>
+          <a:bodyPr vert="horz" lIns="91440" tIns="45720" rIns="91440" bIns="45720" rtlCol="0" anchor="ctr" anchorCtr="0">
+            <a:normAutofit fontScale="55000" lnSpcReduction="20000"/>
           </a:bodyPr>
           <a:lstStyle>
-            <a:lvl1pPr marL="228600" indent="-228600" algn="l" defTabSz="914400" rtl="0" eaLnBrk="1" latinLnBrk="0" hangingPunct="1">
+            <a:lvl1pPr algn="l" defTabSz="914400" rtl="0" eaLnBrk="1" latinLnBrk="0" hangingPunct="1">
               <a:lnSpc>
                 <a:spcPct val="90000"/>
               </a:lnSpc>
               <a:spcBef>
-                <a:spcPts val="1000"/>
+                <a:spcPct val="0"/>
               </a:spcBef>
-              <a:buFont typeface="Arial" panose="020B0604020202020204" pitchFamily="34" charset="0"/>
-              <a:buChar char="•"/>
-              <a:defRPr sz="2800" kern="1200">
-                <a:solidFill>
-                  <a:schemeClr val="tx1"/>
-                </a:solidFill>
-                <a:latin typeface="+mn-lt"/>
-                <a:ea typeface="+mn-ea"/>
-                <a:cs typeface="+mn-cs"/>
+              <a:buNone/>
+              <a:defRPr lang="en-US" sz="2800" kern="1200">
+                <a:solidFill>
+                  <a:schemeClr val="bg2">
+                    <a:lumMod val="25000"/>
+                  </a:schemeClr>
+                </a:solidFill>
+                <a:latin typeface="+mj-lt"/>
+                <a:ea typeface="+mj-ea"/>
+                <a:cs typeface="+mj-cs"/>
               </a:defRPr>
             </a:lvl1pPr>
-            <a:lvl2pPr marL="685800" indent="-228600" algn="l" defTabSz="914400" rtl="0" eaLnBrk="1" latinLnBrk="0" hangingPunct="1">
-              <a:lnSpc>
-                <a:spcPct val="90000"/>
-              </a:lnSpc>
-              <a:spcBef>
-                <a:spcPts val="500"/>
-              </a:spcBef>
-              <a:buFont typeface="Arial" panose="020B0604020202020204" pitchFamily="34" charset="0"/>
-              <a:buChar char="•"/>
-              <a:defRPr sz="2400" kern="1200">
-                <a:solidFill>
-                  <a:schemeClr val="tx1"/>
-                </a:solidFill>
-                <a:latin typeface="+mn-lt"/>
-                <a:ea typeface="+mn-ea"/>
-                <a:cs typeface="+mn-cs"/>
-              </a:defRPr>
-            </a:lvl2pPr>
-            <a:lvl3pPr marL="1143000" indent="-228600" algn="l" defTabSz="914400" rtl="0" eaLnBrk="1" latinLnBrk="0" hangingPunct="1">
-              <a:lnSpc>
-                <a:spcPct val="90000"/>
-              </a:lnSpc>
-              <a:spcBef>
-                <a:spcPts val="500"/>
-              </a:spcBef>
-              <a:buFont typeface="Arial" panose="020B0604020202020204" pitchFamily="34" charset="0"/>
-              <a:buChar char="•"/>
-              <a:defRPr sz="2000" kern="1200">
-                <a:solidFill>
-                  <a:schemeClr val="tx1"/>
-                </a:solidFill>
-                <a:latin typeface="+mn-lt"/>
-                <a:ea typeface="+mn-ea"/>
-                <a:cs typeface="+mn-cs"/>
-              </a:defRPr>
-            </a:lvl3pPr>
-            <a:lvl4pPr marL="1600200" indent="-228600" algn="l" defTabSz="914400" rtl="0" eaLnBrk="1" latinLnBrk="0" hangingPunct="1">
-              <a:lnSpc>
-                <a:spcPct val="90000"/>
-              </a:lnSpc>
-              <a:spcBef>
-                <a:spcPts val="500"/>
-              </a:spcBef>
-              <a:buFont typeface="Arial" panose="020B0604020202020204" pitchFamily="34" charset="0"/>
-              <a:buChar char="•"/>
-              <a:defRPr sz="1800" kern="1200">
-                <a:solidFill>
-                  <a:schemeClr val="tx1"/>
-                </a:solidFill>
-                <a:latin typeface="+mn-lt"/>
-                <a:ea typeface="+mn-ea"/>
-                <a:cs typeface="+mn-cs"/>
-              </a:defRPr>
-            </a:lvl4pPr>
-            <a:lvl5pPr marL="2057400" indent="-228600" algn="l" defTabSz="914400" rtl="0" eaLnBrk="1" latinLnBrk="0" hangingPunct="1">
-              <a:lnSpc>
-                <a:spcPct val="90000"/>
-              </a:lnSpc>
-              <a:spcBef>
-                <a:spcPts val="500"/>
-              </a:spcBef>
-              <a:buFont typeface="Arial" panose="020B0604020202020204" pitchFamily="34" charset="0"/>
-              <a:buChar char="•"/>
-              <a:defRPr sz="1800" kern="1200">
-                <a:solidFill>
-                  <a:schemeClr val="tx1"/>
-                </a:solidFill>
-                <a:latin typeface="+mn-lt"/>
-                <a:ea typeface="+mn-ea"/>
-                <a:cs typeface="+mn-cs"/>
-              </a:defRPr>
-            </a:lvl5pPr>
-            <a:lvl6pPr marL="2514600" indent="-228600" algn="l" defTabSz="914400" rtl="0" eaLnBrk="1" latinLnBrk="0" hangingPunct="1">
-              <a:lnSpc>
-                <a:spcPct val="90000"/>
-              </a:lnSpc>
-              <a:spcBef>
-                <a:spcPts val="500"/>
-              </a:spcBef>
-              <a:buFont typeface="Arial" panose="020B0604020202020204" pitchFamily="34" charset="0"/>
-              <a:buChar char="•"/>
-              <a:defRPr sz="1800" kern="1200">
-                <a:solidFill>
-                  <a:schemeClr val="tx1"/>
-                </a:solidFill>
-                <a:latin typeface="+mn-lt"/>
-                <a:ea typeface="+mn-ea"/>
-                <a:cs typeface="+mn-cs"/>
-              </a:defRPr>
-            </a:lvl6pPr>
-            <a:lvl7pPr marL="2971800" indent="-228600" algn="l" defTabSz="914400" rtl="0" eaLnBrk="1" latinLnBrk="0" hangingPunct="1">
-              <a:lnSpc>
-                <a:spcPct val="90000"/>
-              </a:lnSpc>
-              <a:spcBef>
-                <a:spcPts val="500"/>
-              </a:spcBef>
-              <a:buFont typeface="Arial" panose="020B0604020202020204" pitchFamily="34" charset="0"/>
-              <a:buChar char="•"/>
-              <a:defRPr sz="1800" kern="1200">
-                <a:solidFill>
-                  <a:schemeClr val="tx1"/>
-                </a:solidFill>
-                <a:latin typeface="+mn-lt"/>
-                <a:ea typeface="+mn-ea"/>
-                <a:cs typeface="+mn-cs"/>
-              </a:defRPr>
-            </a:lvl7pPr>
-            <a:lvl8pPr marL="3429000" indent="-228600" algn="l" defTabSz="914400" rtl="0" eaLnBrk="1" latinLnBrk="0" hangingPunct="1">
-              <a:lnSpc>
-                <a:spcPct val="90000"/>
-              </a:lnSpc>
-              <a:spcBef>
-                <a:spcPts val="500"/>
-              </a:spcBef>
-              <a:buFont typeface="Arial" panose="020B0604020202020204" pitchFamily="34" charset="0"/>
-              <a:buChar char="•"/>
-              <a:defRPr sz="1800" kern="1200">
-                <a:solidFill>
-                  <a:schemeClr val="tx1"/>
-                </a:solidFill>
-                <a:latin typeface="+mn-lt"/>
-                <a:ea typeface="+mn-ea"/>
-                <a:cs typeface="+mn-cs"/>
-              </a:defRPr>
-            </a:lvl8pPr>
-            <a:lvl9pPr marL="3886200" indent="-228600" algn="l" defTabSz="914400" rtl="0" eaLnBrk="1" latinLnBrk="0" hangingPunct="1">
-              <a:lnSpc>
-                <a:spcPct val="90000"/>
-              </a:lnSpc>
-              <a:spcBef>
-                <a:spcPts val="500"/>
-              </a:spcBef>
-              <a:buFont typeface="Arial" panose="020B0604020202020204" pitchFamily="34" charset="0"/>
-              <a:buChar char="•"/>
-              <a:defRPr sz="1800" kern="1200">
-                <a:solidFill>
-                  <a:schemeClr val="tx1"/>
-                </a:solidFill>
-                <a:latin typeface="+mn-lt"/>
-                <a:ea typeface="+mn-ea"/>
-                <a:cs typeface="+mn-cs"/>
-              </a:defRPr>
-            </a:lvl9pPr>
           </a:lstStyle>
           <a:p>
-            <a:pPr marL="0" indent="0">
+            <a:pPr>
               <a:lnSpc>
                 <a:spcPct val="150000"/>
               </a:lnSpc>
-              <a:buNone/>
             </a:pPr>
             <a:r>
-              <a:rPr lang="en-IN" sz="1600" dirty="0"/>
+              <a:rPr lang="en-IN" dirty="0"/>
               <a:t>To make the dashboard interactive, I implemented several filters that allow users to explore the data according to their requirements.</a:t>
             </a:r>
-          </a:p>
-          <a:p>
-            <a:pPr marL="0" indent="0">
-              <a:lnSpc>
-                <a:spcPct val="150000"/>
-              </a:lnSpc>
-              <a:buNone/>
-            </a:pPr>
-            <a:r>
-              <a:rPr lang="en-IN" sz="1600" dirty="0"/>
-              <a:t>The available filters are:</a:t>
-            </a:r>
-          </a:p>
-          <a:p>
-            <a:pPr lvl="0">
-              <a:lnSpc>
-                <a:spcPct val="150000"/>
-              </a:lnSpc>
-            </a:pPr>
-            <a:r>
-              <a:rPr lang="en-IN" sz="1600" b="1" dirty="0"/>
-              <a:t>City</a:t>
-            </a:r>
-            <a:r>
-              <a:rPr lang="en-IN" sz="1600" dirty="0"/>
-              <a:t> – View properties from a specific city. </a:t>
-            </a:r>
-          </a:p>
-          <a:p>
-            <a:pPr lvl="0">
-              <a:lnSpc>
-                <a:spcPct val="150000"/>
-              </a:lnSpc>
-            </a:pPr>
-            <a:r>
-              <a:rPr lang="en-IN" sz="1600" b="1" dirty="0"/>
-              <a:t>Property Type</a:t>
-            </a:r>
-            <a:r>
-              <a:rPr lang="en-IN" sz="1600" dirty="0"/>
-              <a:t> – Filter properties such as apartments, villas, or commercial properties. </a:t>
-            </a:r>
-          </a:p>
-          <a:p>
-            <a:pPr lvl="0">
-              <a:lnSpc>
-                <a:spcPct val="150000"/>
-              </a:lnSpc>
-            </a:pPr>
-            <a:r>
-              <a:rPr lang="en-IN" sz="1600" b="1" dirty="0"/>
-              <a:t>Price Range</a:t>
-            </a:r>
-            <a:r>
-              <a:rPr lang="en-IN" sz="1600" dirty="0"/>
-              <a:t> – </a:t>
-            </a:r>
-            <a:r>
-              <a:rPr lang="en-IN" sz="1600" dirty="0" err="1"/>
-              <a:t>Analyze</a:t>
-            </a:r>
-            <a:r>
-              <a:rPr lang="en-IN" sz="1600" dirty="0"/>
-              <a:t> properties within a selected budget. </a:t>
-            </a:r>
-          </a:p>
-          <a:p>
-            <a:pPr lvl="0">
-              <a:lnSpc>
-                <a:spcPct val="150000"/>
-              </a:lnSpc>
-            </a:pPr>
-            <a:r>
-              <a:rPr lang="en-IN" sz="1600" b="1" dirty="0"/>
-              <a:t>Agent</a:t>
-            </a:r>
-            <a:r>
-              <a:rPr lang="en-IN" sz="1600" dirty="0"/>
-              <a:t> – Display properties managed by a particular real estate agent. </a:t>
-            </a:r>
-          </a:p>
-          <a:p>
-            <a:pPr lvl="0">
-              <a:lnSpc>
-                <a:spcPct val="150000"/>
-              </a:lnSpc>
-            </a:pPr>
-            <a:r>
-              <a:rPr lang="en-IN" sz="1600" b="1" dirty="0"/>
-              <a:t>Listed Date</a:t>
-            </a:r>
-            <a:r>
-              <a:rPr lang="en-IN" sz="1600" dirty="0"/>
-              <a:t> – Filter properties based on their listing date. </a:t>
-            </a:r>
-          </a:p>
-          <a:p>
-            <a:pPr lvl="0">
-              <a:lnSpc>
-                <a:spcPct val="150000"/>
-              </a:lnSpc>
-            </a:pPr>
-            <a:r>
-              <a:rPr lang="en-IN" sz="1600" b="1" dirty="0"/>
-              <a:t>Sale Date</a:t>
-            </a:r>
-            <a:r>
-              <a:rPr lang="en-IN" sz="1600" dirty="0"/>
-              <a:t> – </a:t>
-            </a:r>
-            <a:r>
-              <a:rPr lang="en-IN" sz="1600" dirty="0" err="1"/>
-              <a:t>Analyze</a:t>
-            </a:r>
-            <a:r>
-              <a:rPr lang="en-IN" sz="1600" dirty="0"/>
-              <a:t> properties sold during a selected time period. </a:t>
-            </a:r>
-          </a:p>
-          <a:p>
-            <a:pPr marL="0" indent="0">
-              <a:lnSpc>
-                <a:spcPct val="150000"/>
-              </a:lnSpc>
-              <a:buNone/>
-            </a:pPr>
-            <a:r>
-              <a:rPr lang="en-IN" sz="1600" dirty="0"/>
-              <a:t>Whenever a filter is applied, the dashboard dynamically updates the displayed property listings and analytics, allowing users to perform focused data exploration.</a:t>
-            </a:r>
-          </a:p>
-          <a:p>
-            <a:pPr marL="0" indent="0">
-              <a:lnSpc>
-                <a:spcPct val="150000"/>
-              </a:lnSpc>
-              <a:buNone/>
-            </a:pPr>
-            <a:endParaRPr lang="en-IN" sz="1600" dirty="0"/>
           </a:p>
         </p:txBody>
       </p:sp>
+      <p:pic>
+        <p:nvPicPr>
+          <p:cNvPr id="13" name="Content Placeholder 12">
+            <a:extLst>
+              <a:ext uri="{FF2B5EF4-FFF2-40B4-BE49-F238E27FC236}">
+                <a16:creationId xmlns:a16="http://schemas.microsoft.com/office/drawing/2014/main" id="{D5DD5AAA-2E8A-96EB-1D31-F01A91B7C7E4}"/>
+              </a:ext>
+            </a:extLst>
+          </p:cNvPr>
+          <p:cNvPicPr>
+            <a:picLocks noGrp="1" noChangeAspect="1"/>
+          </p:cNvPicPr>
+          <p:nvPr>
+            <p:ph idx="13"/>
+          </p:nvPr>
+        </p:nvPicPr>
+        <p:blipFill>
+          <a:blip r:embed="rId2"/>
+          <a:stretch>
+            <a:fillRect/>
+          </a:stretch>
+        </p:blipFill>
+        <p:spPr>
+          <a:xfrm>
+            <a:off x="7138219" y="2671931"/>
+            <a:ext cx="4768646" cy="3011113"/>
+          </a:xfrm>
+          <a:prstGeom prst="rect">
+            <a:avLst/>
+          </a:prstGeom>
+        </p:spPr>
+      </p:pic>
     </p:spTree>
     <p:extLst>
       <p:ext uri="{BB962C8B-B14F-4D97-AF65-F5344CB8AC3E}">
-        <p14:creationId xmlns:p14="http://schemas.microsoft.com/office/powerpoint/2010/main" val="2784742190"/>
+        <p14:creationId xmlns:p14="http://schemas.microsoft.com/office/powerpoint/2010/main" val="4192124012"/>
       </p:ext>
     </p:extLst>
   </p:cSld>

--- a/presentation/Presentation.pptx
+++ b/presentation/Presentation.pptx
@@ -245,7 +245,7 @@
           <a:p>
             <a:fld id="{E4C3FCC2-4E7A-4671-AA79-177CB194E449}" type="datetimeFigureOut">
               <a:rPr lang="en-US" smtClean="0"/>
-              <a:t>8/4/2026</a:t>
+              <a:t>8/6/2026</a:t>
             </a:fld>
             <a:endParaRPr lang="en-US"/>
           </a:p>
@@ -2218,7 +2218,7 @@
           <a:p>
             <a:fld id="{4744E560-77BF-4D1A-B6E7-CD55CE12B1B8}" type="datetimeFigureOut">
               <a:rPr lang="en-US" smtClean="0"/>
-              <a:t>8/4/2026</a:t>
+              <a:t>8/6/2026</a:t>
             </a:fld>
             <a:endParaRPr lang="en-US"/>
           </a:p>
@@ -3190,10 +3190,10 @@
       </p:sp>
       <p:pic>
         <p:nvPicPr>
-          <p:cNvPr id="9" name="Picture 8">
+          <p:cNvPr id="4" name="Picture 3">
             <a:extLst>
               <a:ext uri="{FF2B5EF4-FFF2-40B4-BE49-F238E27FC236}">
-                <a16:creationId xmlns:a16="http://schemas.microsoft.com/office/drawing/2014/main" id="{D4BE9C9C-DBFD-F822-FC6B-501DD4C3D504}"/>
+                <a16:creationId xmlns:a16="http://schemas.microsoft.com/office/drawing/2014/main" id="{779A5AF1-ED44-688F-214F-A56A880E835E}"/>
               </a:ext>
             </a:extLst>
           </p:cNvPr>
@@ -3210,14 +3210,63 @@
         </p:blipFill>
         <p:spPr>
           <a:xfrm>
-            <a:off x="7177548" y="1343875"/>
-            <a:ext cx="4532671" cy="4561900"/>
+            <a:off x="7177548" y="1485932"/>
+            <a:ext cx="4727858" cy="2856269"/>
           </a:xfrm>
           <a:prstGeom prst="rect">
             <a:avLst/>
           </a:prstGeom>
         </p:spPr>
       </p:pic>
+      <p:sp>
+        <p:nvSpPr>
+          <p:cNvPr id="5" name="TextBox 4">
+            <a:extLst>
+              <a:ext uri="{FF2B5EF4-FFF2-40B4-BE49-F238E27FC236}">
+                <a16:creationId xmlns:a16="http://schemas.microsoft.com/office/drawing/2014/main" id="{CB21AE5A-754B-C7CC-36E1-1BC47E4B922D}"/>
+              </a:ext>
+            </a:extLst>
+          </p:cNvPr>
+          <p:cNvSpPr txBox="1"/>
+          <p:nvPr/>
+        </p:nvSpPr>
+        <p:spPr>
+          <a:xfrm>
+            <a:off x="9379974" y="2861187"/>
+            <a:ext cx="0" cy="0"/>
+          </a:xfrm>
+          <a:prstGeom prst="rect">
+            <a:avLst/>
+          </a:prstGeom>
+        </p:spPr>
+        <p:txBody>
+          <a:bodyPr vert="horz" wrap="none" lIns="91440" tIns="45720" rIns="91440" bIns="45720" rtlCol="0">
+            <a:noAutofit/>
+          </a:bodyPr>
+          <a:lstStyle/>
+          <a:p>
+            <a:pPr marL="0" indent="0" algn="l">
+              <a:lnSpc>
+                <a:spcPts val="1800"/>
+              </a:lnSpc>
+              <a:spcAft>
+                <a:spcPts val="600"/>
+              </a:spcAft>
+              <a:buNone/>
+            </a:pPr>
+            <a:endParaRPr lang="en-IN" sz="1200" dirty="0">
+              <a:solidFill>
+                <a:prstClr val="black">
+                  <a:lumMod val="75000"/>
+                  <a:lumOff val="25000"/>
+                </a:prstClr>
+              </a:solidFill>
+              <a:latin typeface="Segoe UI" panose="020B0502040204020203" pitchFamily="34" charset="0"/>
+              <a:cs typeface="Segoe UI" panose="020B0502040204020203" pitchFamily="34" charset="0"/>
+            </a:endParaRPr>
+          </a:p>
+        </p:txBody>
+      </p:sp>
     </p:spTree>
     <p:extLst>
       <p:ext uri="{BB962C8B-B14F-4D97-AF65-F5344CB8AC3E}">
